--- a/docs/Presentation-2026-May/BIMGUARD_FMP_D_Integrated_Overview.pptx
+++ b/docs/Presentation-2026-May/BIMGUARD_FMP_D_Integrated_Overview.pptx
@@ -3977,7 +3977,7 @@
                 </a:solidFill>
                 <a:latin typeface="Calibri"/>
               </a:rPr>
-              <a:t>Jurisdiction choice dominates the outcome</a:t>
+              <a:t>Clearance choice dominates the outcome</a:t>
             </a:r>
           </a:p>
         </p:txBody>
@@ -4949,7 +4949,7 @@
                 </a:solidFill>
                 <a:latin typeface="Calibri"/>
               </a:rPr>
-              <a:t>EN 1998-1 + DIN 4149</a:t>
+              <a:t>SB-001 authored calibration¹</a:t>
             </a:r>
           </a:p>
         </p:txBody>
@@ -5190,7 +5190,7 @@
                 </a:solidFill>
                 <a:latin typeface="Calibri"/>
               </a:rPr>
-              <a:t>ASCE 7-22 + NFPA 13</a:t>
+              <a:t>—</a:t>
             </a:r>
           </a:p>
         </p:txBody>
@@ -5561,6 +5561,45 @@
         </p:nvSpPr>
         <p:spPr>
           <a:xfrm>
+            <a:off x="228600" y="2953512"/>
+            <a:ext cx="8686800" cy="182880"/>
+          </a:xfrm>
+          <a:prstGeom prst="rect">
+            <a:avLst/>
+          </a:prstGeom>
+          <a:noFill/>
+        </p:spPr>
+        <p:txBody>
+          <a:bodyPr wrap="square" anchor="t" lIns="0" rIns="0" tIns="0" bIns="0">
+            <a:spAutoFit/>
+          </a:bodyPr>
+          <a:lstStyle/>
+          <a:p>
+            <a:pPr algn="l">
+              <a:lnSpc>
+                <a:spcPct val="100000"/>
+              </a:lnSpc>
+            </a:pPr>
+            <a:r>
+              <a:rPr sz="900" b="0">
+                <a:solidFill>
+                  <a:srgbClr val="8896A6"/>
+                </a:solidFill>
+                <a:latin typeface="Calibri"/>
+              </a:rPr>
+              <a:t>¹ BIMGUARD SB-001 screening calibration (authored thresholds, not code values)</a:t>
+            </a:r>
+          </a:p>
+        </p:txBody>
+      </p:sp>
+      <p:sp>
+        <p:nvSpPr>
+          <p:cNvPr id="45" name="TextBox 44"/>
+          <p:cNvSpPr txBox="1"/>
+          <p:nvPr/>
+        </p:nvSpPr>
+        <p:spPr>
+          <a:xfrm>
             <a:off x="228600" y="3154680"/>
             <a:ext cx="8686800" cy="640080"/>
           </a:xfrm>
@@ -5587,7 +5626,7 @@
                 </a:solidFill>
                 <a:latin typeface="Calibri"/>
               </a:rPr>
-              <a:t>Moving from the European to the US standard produces 66% more clashes and 48% fewer Critical ones, because severity is an overlap ratio and a larger clearance inflates the denominator. Reproduced on two independent subsets.</a:t>
+              <a:t>Raising the clearance from the 200 mm row to the 457.2 mm row produces 66% more clashes and 48% fewer Critical ones, because severity is an overlap ratio and a larger clearance inflates the denominator. Reproduced on two independent subsets.</a:t>
             </a:r>
           </a:p>
         </p:txBody>

--- a/docs/Presentation-2026-May/BIMGUARD_FMP_D_Integrated_Overview.pptx
+++ b/docs/Presentation-2026-May/BIMGUARD_FMP_D_Integrated_Overview.pptx
@@ -22909,7 +22909,7 @@
                 </a:solidFill>
                 <a:latin typeface="Calibri"/>
               </a:rPr>
-              <a:t>Crevice Corrosion Temperature table from SS304 to Titanium Gr 2; 14-type joint geometry library from butt weld to threaded connection.</a:t>
+              <a:t>Crevice Corrosion Temperature table from SS304 to Titanium Gr 2; 14-type joint geometry library from butt weld to threaded connection — seeded but never executed: every joint scores JT-014 Unknown (Tight).</a:t>
             </a:r>
           </a:p>
         </p:txBody>
